--- a/tasks/artifacts/scout-judges.pptx
+++ b/tasks/artifacts/scout-judges.pptx
@@ -31,6 +31,7 @@
     <p:sldId id="279" r:id="rId25"/>
     <p:sldId id="280" r:id="rId26"/>
     <p:sldId id="281" r:id="rId27"/>
+    <p:sldId id="290" r:id="rId41"/>
     <p:sldId id="282" r:id="rId28"/>
     <p:sldId id="283" r:id="rId29"/>
     <p:sldId id="284" r:id="rId30"/>
@@ -1503,7 +1504,7 @@
           <a:p>
             <a:r>
               <a:rPr lang="en-US" dirty="0"/>
-              <a:t>The 60 is the demo balloon, not the big worked example. The big example, 350 cash and 300 score cost, comes later with the formulas. Caps are the unset form.</a:t>
+              <a:t>The 60 is the demo rice, not the big worked example. The big example, 350 cash and 300 score cost, comes later with the formulas. Caps are the unset form.</a:t>
             </a:r>
             <a:endParaRPr lang="en-US" dirty="0"/>
           </a:p>
@@ -2295,7 +2296,7 @@
           <a:p>
             <a:r>
               <a:rPr lang="en-US" dirty="0"/>
-              <a:t>The flip is 1 minus this cash over highest cash, the linear cost scale when the floor is treated as 0. Do not claim the shares were learned. They are a prior for snacks and balloons.</a:t>
+              <a:t>The flip is 1 minus this cash over highest cash, the linear cost scale when the floor is treated as 0. Do not claim the shares were learned. They are a prior for snacks and groceries.</a:t>
             </a:r>
             <a:endParaRPr lang="en-US" dirty="0"/>
           </a:p>
@@ -8965,7 +8966,7 @@
                 <a:ea typeface="Cambria" pitchFamily="34" charset="-122"/>
                 <a:cs typeface="Cambria" pitchFamily="34" charset="-120"/>
               </a:rPr>
-              <a:t>Red balloons, then one card charge</a:t>
+              <a:t>Plain rice, then one card charge</a:t>
             </a:r>
             <a:endParaRPr lang="en-US" sz="3200" dirty="0"/>
           </a:p>
@@ -9072,7 +9073,7 @@
                 <a:ea typeface="Calibri" pitchFamily="34" charset="-122"/>
                 <a:cs typeface="Calibri" pitchFamily="34" charset="-120"/>
               </a:rPr>
-              <a:t>“Red balloons.”</a:t>
+              <a:t>“Plain rice.”</a:t>
             </a:r>
             <a:endParaRPr lang="en-US" sz="1600" dirty="0"/>
           </a:p>
@@ -9150,7 +9151,7 @@
                 <a:ea typeface="Calibri" pitchFamily="34" charset="-122"/>
                 <a:cs typeface="Calibri" pitchFamily="34" charset="-120"/>
               </a:rPr>
-              <a:t>One balloon goal. Quantity stays editable. A sentence that overrides the form never becomes a search.</a:t>
+              <a:t>One groceries goal. Quantity stays editable. A sentence that overrides the form never becomes a search.</a:t>
             </a:r>
             <a:endParaRPr lang="en-US" sz="1300" dirty="0"/>
           </a:p>
@@ -9520,7 +9521,7 @@
                 <a:ea typeface="Calibri" pitchFamily="34" charset="-122"/>
                 <a:cs typeface="Calibri" pitchFamily="34" charset="-120"/>
               </a:rPr>
-              <a:t>Poison, a higher agent price, and missing shipping are dropped. The clean balloon rows fit the caps.</a:t>
+              <a:t>Poison, a higher agent price, and missing shipping are dropped. The clean rice row fits the caps.</a:t>
             </a:r>
             <a:endParaRPr lang="en-US" sz="1300" dirty="0"/>
           </a:p>
@@ -12559,7 +12560,7 @@
                 <a:ea typeface="Calibri" pitchFamily="34" charset="-122"/>
                 <a:cs typeface="Calibri" pitchFamily="34" charset="-120"/>
               </a:rPr>
-              <a:t>Red balloons, but the expiry has passed. The shopper asks the mandate. Stop. No website is called. A revoked form ends the same way.</a:t>
+              <a:t>Plain rice, but the expiry has passed. The shopper asks the mandate. Stop. No website is called. A revoked form ends the same way.</a:t>
             </a:r>
             <a:endParaRPr lang="en-US" sz="1500" dirty="0"/>
           </a:p>
@@ -14098,7 +14099,7 @@
                 <a:ea typeface="Calibri" pitchFamily="34" charset="-122"/>
                 <a:cs typeface="Calibri" pitchFamily="34" charset="-120"/>
               </a:rPr>
-              <a:t>Red balloons. Shelf 50 plus shipping 10. One card charge. The week rises by 60, not by the score.</a:t>
+              <a:t>Plain rice. Shelf 50 plus shipping 10. One card charge. The week rises by 60, not by the score.</a:t>
             </a:r>
             <a:endParaRPr lang="en-US" sz="1500" dirty="0"/>
           </a:p>
@@ -15167,7 +15168,7 @@
                 <a:ea typeface="Calibri" pitchFamily="34" charset="-122"/>
                 <a:cs typeface="Calibri" pitchFamily="34" charset="-120"/>
               </a:rPr>
-              <a:t>The red-balloon quote is the same identity at a smaller size: 50 + 10 = 60. No card rule, so the discount is 0.</a:t>
+              <a:t>The plain-rice quote is the same identity at a smaller size: 50 + 10 = 60. No card rule, so the discount is 0.</a:t>
             </a:r>
             <a:endParaRPr lang="en-US" sz="1400" dirty="0"/>
           </a:p>
@@ -20010,7 +20011,7 @@
                 <a:ea typeface="Calibri" pitchFamily="34" charset="-122"/>
                 <a:cs typeface="Calibri" pitchFamily="34" charset="-120"/>
               </a:rPr>
-              <a:t>Second, because balanced mode is not cheapest-only. Lowest cash moves this share to 0.60 and shrinks the others to 0.20, 0.10, 0.05, 0.05. “Cheapest” in a sentence asks; it does not swap the vector.</a:t>
+              <a:t>Second, because balanced mode is not cheapest-only. Every other mix puts 0.60 on its lead part, the same shape as lowest cash. A named mix in a sentence asks; it does not swap the vector.</a:t>
             </a:r>
             <a:endParaRPr lang="en-US" sz="1400" dirty="0"/>
           </a:p>
@@ -21638,7 +21639,7 @@
                 <a:ea typeface="Calibri" pitchFamily="34" charset="-122"/>
                 <a:cs typeface="Calibri" pitchFamily="34" charset="-120"/>
               </a:rPr>
-              <a:t>27</a:t>
+              <a:t>28</a:t>
             </a:r>
             <a:endParaRPr lang="en-US" sz="1200" dirty="0"/>
           </a:p>
@@ -22361,7 +22362,7 @@
                 <a:ea typeface="Calibri" pitchFamily="34" charset="-122"/>
                 <a:cs typeface="Calibri" pitchFamily="34" charset="-120"/>
               </a:rPr>
-              <a:t>28</a:t>
+              <a:t>29</a:t>
             </a:r>
             <a:endParaRPr lang="en-US" sz="1200" dirty="0"/>
           </a:p>
@@ -22899,7 +22900,7 @@
                 <a:ea typeface="Calibri" pitchFamily="34" charset="-122"/>
                 <a:cs typeface="Calibri" pitchFamily="34" charset="-120"/>
               </a:rPr>
-              <a:t>Allow and deny, from the closed snack and balloon tree.</a:t>
+              <a:t>Allow and deny, from the closed snack and grocery tree.</a:t>
             </a:r>
             <a:endParaRPr lang="en-US" sz="1300" dirty="0"/>
           </a:p>
@@ -23648,7 +23649,7 @@
                 <a:ea typeface="Calibri" pitchFamily="34" charset="-122"/>
                 <a:cs typeface="Calibri" pitchFamily="34" charset="-120"/>
               </a:rPr>
-              <a:t>Balanced, or lowest cash. This picks the five shares.</a:t>
+              <a:t>Balanced, lowest cash, relevance, rating, popular, or familiar. This picks the five shares.</a:t>
             </a:r>
             <a:endParaRPr lang="en-US" sz="1300" dirty="0"/>
           </a:p>
@@ -23833,7 +23834,7 @@
                 <a:ea typeface="Calibri" pitchFamily="34" charset="-122"/>
                 <a:cs typeface="Calibri" pitchFamily="34" charset="-120"/>
               </a:rPr>
-              <a:t>29</a:t>
+              <a:t>30</a:t>
             </a:r>
             <a:endParaRPr lang="en-US" sz="1200" dirty="0"/>
           </a:p>
@@ -24277,7 +24278,7 @@
                 <a:ea typeface="Calibri" pitchFamily="34" charset="-122"/>
                 <a:cs typeface="Calibri" pitchFamily="34" charset="-120"/>
               </a:rPr>
-              <a:t>The goal, such as balloons. “Party items” becomes an editable list. Quantities stay blank until they are set.</a:t>
+              <a:t>The goal, such as groceries. “Food” becomes an editable list. Quantities stay blank until they are set.</a:t>
             </a:r>
             <a:endParaRPr lang="en-US" sz="1300" dirty="0"/>
           </a:p>
@@ -24618,7 +24619,7 @@
                 <a:ea typeface="Calibri" pitchFamily="34" charset="-122"/>
                 <a:cs typeface="Calibri" pitchFamily="34" charset="-120"/>
               </a:rPr>
-              <a:t>Turn “cheapest” into the lowest-cash vector while the form is balanced.</a:t>
+              <a:t>Turn a named mix into a different vector while the form says something else.</a:t>
             </a:r>
             <a:endParaRPr lang="en-US" sz="1400" dirty="0"/>
           </a:p>
@@ -24852,7 +24853,7 @@
                 <a:ea typeface="Calibri" pitchFamily="34" charset="-122"/>
                 <a:cs typeface="Calibri" pitchFamily="34" charset="-120"/>
               </a:rPr>
-              <a:t>30</a:t>
+              <a:t>31</a:t>
             </a:r>
             <a:endParaRPr lang="en-US" sz="1200" dirty="0"/>
           </a:p>
@@ -25682,7 +25683,7 @@
                 <a:ea typeface="Calibri" pitchFamily="34" charset="-122"/>
                 <a:cs typeface="Calibri" pitchFamily="34" charset="-120"/>
               </a:rPr>
-              <a:t>31</a:t>
+              <a:t>32</a:t>
             </a:r>
             <a:endParaRPr lang="en-US" sz="1200" dirty="0"/>
           </a:p>
@@ -26833,7 +26834,7 @@
                 <a:ea typeface="Calibri" pitchFamily="34" charset="-122"/>
                 <a:cs typeface="Calibri" pitchFamily="34" charset="-120"/>
               </a:rPr>
-              <a:t>32</a:t>
+              <a:t>33</a:t>
             </a:r>
             <a:endParaRPr lang="en-US" sz="1200" dirty="0"/>
           </a:p>
@@ -27663,7 +27664,7 @@
                 <a:ea typeface="Calibri" pitchFamily="34" charset="-122"/>
                 <a:cs typeface="Calibri" pitchFamily="34" charset="-120"/>
               </a:rPr>
-              <a:t>33</a:t>
+              <a:t>34</a:t>
             </a:r>
             <a:endParaRPr lang="en-US" sz="1200" dirty="0"/>
           </a:p>
@@ -28172,7 +28173,623 @@
                 <a:ea typeface="Calibri" pitchFamily="34" charset="-122"/>
                 <a:cs typeface="Calibri" pitchFamily="34" charset="-120"/>
               </a:rPr>
-              <a:t>34</a:t>
+              <a:t>35</a:t>
+            </a:r>
+            <a:endParaRPr lang="en-US" sz="1200" dirty="0"/>
+          </a:p>
+        </p:txBody>
+      </p:sp>
+    </p:spTree>
+  </p:cSld>
+  <p:clrMapOvr>
+    <a:masterClrMapping/>
+  </p:clrMapOvr>
+</p:sld>
+</file>
+
+<file path=ppt/slides/slide35.xml><?xml version="1.0" encoding="utf-8"?>
+<p:sld xmlns:a="http://schemas.openxmlformats.org/drawingml/2006/main" xmlns:r="http://schemas.openxmlformats.org/officeDocument/2006/relationships" xmlns:p="http://schemas.openxmlformats.org/presentationml/2006/main">
+  <p:cSld name="Slide 26">
+    <p:bg>
+      <p:bgPr>
+        <a:solidFill>
+          <a:srgbClr val="FFFFFF"/>
+        </a:solidFill>
+      </p:bgPr>
+    </p:bg>
+    <p:spTree>
+      <p:nvGrpSpPr>
+        <p:cNvPr id="1" name=""/>
+        <p:cNvGrpSpPr/>
+        <p:nvPr/>
+      </p:nvGrpSpPr>
+      <p:grpSpPr>
+        <a:xfrm>
+          <a:off x="0" y="0"/>
+          <a:ext cx="0" cy="0"/>
+          <a:chOff x="0" y="0"/>
+          <a:chExt cx="0" cy="0"/>
+        </a:xfrm>
+      </p:grpSpPr>
+      <p:sp>
+        <p:nvSpPr>
+          <p:cNvPr id="2" name="Text 0"/>
+          <p:cNvSpPr/>
+          <p:nvPr/>
+        </p:nvSpPr>
+        <p:spPr>
+          <a:xfrm>
+            <a:off x="502920" y="256032"/>
+            <a:ext cx="11155680" cy="237744"/>
+          </a:xfrm>
+          <a:prstGeom prst="rect">
+            <a:avLst/>
+          </a:prstGeom>
+          <a:noFill/>
+          <a:ln/>
+        </p:spPr>
+        <p:txBody>
+          <a:bodyPr wrap="square" lIns="0" tIns="0" rIns="0" bIns="0" rtlCol="0" anchor="ctr"/>
+          <a:lstStyle/>
+          <a:p>
+            <a:pPr indent="0" marL="0">
+              <a:buNone/>
+            </a:pPr>
+            <a:r>
+              <a:rPr lang="en-US" sz="1300" b="1" spc="110" kern="0" dirty="0">
+                <a:solidFill>
+                  <a:srgbClr val="A67C2D"/>
+                </a:solidFill>
+                <a:latin typeface="Calibri" pitchFamily="34" charset="0"/>
+                <a:ea typeface="Calibri" pitchFamily="34" charset="-122"/>
+                <a:cs typeface="Calibri" pitchFamily="34" charset="-120"/>
+              </a:rPr>
+              <a:t>THE PACKAGED MIXES</a:t>
+            </a:r>
+            <a:endParaRPr lang="en-US" sz="1300" dirty="0"/>
+          </a:p>
+        </p:txBody>
+      </p:sp>
+      <p:sp>
+        <p:nvSpPr>
+          <p:cNvPr id="3" name="Text 1"/>
+          <p:cNvSpPr/>
+          <p:nvPr/>
+        </p:nvSpPr>
+        <p:spPr>
+          <a:xfrm>
+            <a:off x="502920" y="493776"/>
+            <a:ext cx="11155680" cy="438912"/>
+          </a:xfrm>
+          <a:prstGeom prst="rect">
+            <a:avLst/>
+          </a:prstGeom>
+          <a:noFill/>
+          <a:ln/>
+        </p:spPr>
+        <p:txBody>
+          <a:bodyPr wrap="square" lIns="0" tIns="0" rIns="0" bIns="0" rtlCol="0" anchor="ctr"/>
+          <a:lstStyle/>
+          <a:p>
+            <a:pPr indent="0" marL="0">
+              <a:buNone/>
+            </a:pPr>
+            <a:r>
+              <a:rPr lang="en-US" sz="3200" b="1" dirty="0">
+                <a:solidFill>
+                  <a:srgbClr val="14202C"/>
+                </a:solidFill>
+                <a:latin typeface="Cambria" pitchFamily="34" charset="0"/>
+                <a:ea typeface="Cambria" pitchFamily="34" charset="-122"/>
+                <a:cs typeface="Cambria" pitchFamily="34" charset="-120"/>
+              </a:rPr>
+              <a:t>The form picks one. A sentence cannot switch it.</a:t>
+            </a:r>
+            <a:endParaRPr lang="en-US" sz="3200" dirty="0"/>
+          </a:p>
+        </p:txBody>
+      </p:sp>
+      <p:sp>
+        <p:nvSpPr>
+          <p:cNvPr id="4" name="Shape 2"/>
+          <p:cNvSpPr/>
+          <p:nvPr/>
+        </p:nvSpPr>
+        <p:spPr>
+          <a:xfrm>
+            <a:off x="457200" y="1115568"/>
+            <a:ext cx="11247120" cy="1170432"/>
+          </a:xfrm>
+          <a:prstGeom prst="roundRect">
+            <a:avLst>
+              <a:gd name="adj" fmla="val 6250"/>
+            </a:avLst>
+          </a:prstGeom>
+          <a:solidFill>
+            <a:srgbClr val="FFFFFF"/>
+          </a:solidFill>
+          <a:ln/>
+          <a:effectLst>
+            <a:outerShdw sx="100000" sy="100000" kx="0" ky="0" algn="bl" rotWithShape="0" blurRad="152400" dist="38100" dir="5400000">
+              <a:srgbClr val="0F1C2E">
+                <a:alpha val="10000"/>
+              </a:srgbClr>
+            </a:outerShdw>
+          </a:effectLst>
+        </p:spPr>
+      </p:sp>
+      <p:sp>
+        <p:nvSpPr>
+          <p:cNvPr id="5" name="Text 3"/>
+          <p:cNvSpPr/>
+          <p:nvPr/>
+        </p:nvSpPr>
+        <p:spPr>
+          <a:xfrm>
+            <a:off x="658368" y="1280160"/>
+            <a:ext cx="3017520" cy="822960"/>
+          </a:xfrm>
+          <a:prstGeom prst="rect">
+            <a:avLst/>
+          </a:prstGeom>
+          <a:noFill/>
+          <a:ln/>
+        </p:spPr>
+        <p:txBody>
+          <a:bodyPr wrap="square" lIns="0" tIns="0" rIns="0" bIns="0" rtlCol="0" anchor="ctr"/>
+          <a:lstStyle/>
+          <a:p>
+            <a:pPr algn="l" indent="0" marL="0">
+              <a:buNone/>
+            </a:pPr>
+            <a:r>
+              <a:rPr lang="en-US" sz="1800" b="1" dirty="0">
+                <a:solidFill>
+                  <a:srgbClr val="0F1C2E"/>
+                </a:solidFill>
+                <a:latin typeface="Cambria" pitchFamily="34" charset="0"/>
+                <a:ea typeface="Cambria" pitchFamily="34" charset="-122"/>
+                <a:cs typeface="Cambria" pitchFamily="34" charset="-120"/>
+              </a:rPr>
+              <a:t>Balanced</a:t>
+            </a:r>
+            <a:endParaRPr lang="en-US" sz="1800" dirty="0"/>
+          </a:p>
+        </p:txBody>
+      </p:sp>
+      <p:sp>
+        <p:nvSpPr>
+          <p:cNvPr id="6" name="Text 4"/>
+          <p:cNvSpPr/>
+          <p:nvPr/>
+        </p:nvSpPr>
+        <p:spPr>
+          <a:xfrm>
+            <a:off x="3794760" y="1261872"/>
+            <a:ext cx="7680960" cy="896112"/>
+          </a:xfrm>
+          <a:prstGeom prst="rect">
+            <a:avLst/>
+          </a:prstGeom>
+          <a:noFill/>
+          <a:ln/>
+        </p:spPr>
+        <p:txBody>
+          <a:bodyPr wrap="square" lIns="0" tIns="0" rIns="0" bIns="0" rtlCol="0" anchor="t"/>
+          <a:lstStyle/>
+          <a:p>
+            <a:pPr algn="l" indent="0" marL="0">
+              <a:buNone/>
+            </a:pPr>
+            <a:r>
+              <a:rPr lang="en-US" sz="1400" dirty="0">
+                <a:solidFill>
+                  <a:srgbClr val="14202C"/>
+                </a:solidFill>
+                <a:latin typeface="Calibri" pitchFamily="34" charset="0"/>
+                <a:ea typeface="Calibri" pitchFamily="34" charset="-122"/>
+                <a:cs typeface="Calibri" pitchFamily="34" charset="-120"/>
+              </a:rPr>
+              <a:t>0.35, 0.25, 0.15, 0.10, 0.15. Matching leads, then money, stars, a past purchase, and how many people bought it.</a:t>
+            </a:r>
+            <a:endParaRPr lang="en-US" sz="1400" dirty="0"/>
+          </a:p>
+        </p:txBody>
+      </p:sp>
+      <p:sp>
+        <p:nvSpPr>
+          <p:cNvPr id="7" name="Shape 5"/>
+          <p:cNvSpPr/>
+          <p:nvPr/>
+        </p:nvSpPr>
+        <p:spPr>
+          <a:xfrm>
+            <a:off x="457200" y="2395728"/>
+            <a:ext cx="11247120" cy="1170432"/>
+          </a:xfrm>
+          <a:prstGeom prst="roundRect">
+            <a:avLst>
+              <a:gd name="adj" fmla="val 6250"/>
+            </a:avLst>
+          </a:prstGeom>
+          <a:solidFill>
+            <a:srgbClr val="FFFFFF"/>
+          </a:solidFill>
+          <a:ln/>
+          <a:effectLst>
+            <a:outerShdw sx="100000" sy="100000" kx="0" ky="0" algn="bl" rotWithShape="0" blurRad="152400" dist="38100" dir="5400000">
+              <a:srgbClr val="0F1C2E">
+                <a:alpha val="10000"/>
+              </a:srgbClr>
+            </a:outerShdw>
+          </a:effectLst>
+        </p:spPr>
+      </p:sp>
+      <p:sp>
+        <p:nvSpPr>
+          <p:cNvPr id="8" name="Text 6"/>
+          <p:cNvSpPr/>
+          <p:nvPr/>
+        </p:nvSpPr>
+        <p:spPr>
+          <a:xfrm>
+            <a:off x="658368" y="2560320"/>
+            <a:ext cx="3017520" cy="822960"/>
+          </a:xfrm>
+          <a:prstGeom prst="rect">
+            <a:avLst/>
+          </a:prstGeom>
+          <a:noFill/>
+          <a:ln/>
+        </p:spPr>
+        <p:txBody>
+          <a:bodyPr wrap="square" lIns="0" tIns="0" rIns="0" bIns="0" rtlCol="0" anchor="ctr"/>
+          <a:lstStyle/>
+          <a:p>
+            <a:pPr algn="l" indent="0" marL="0">
+              <a:buNone/>
+            </a:pPr>
+            <a:r>
+              <a:rPr lang="en-US" sz="1800" b="1" dirty="0">
+                <a:solidFill>
+                  <a:srgbClr val="0F1C2E"/>
+                </a:solidFill>
+                <a:latin typeface="Cambria" pitchFamily="34" charset="0"/>
+                <a:ea typeface="Cambria" pitchFamily="34" charset="-122"/>
+                <a:cs typeface="Cambria" pitchFamily="34" charset="-120"/>
+              </a:rPr>
+              <a:t>Lowest cash</a:t>
+            </a:r>
+            <a:endParaRPr lang="en-US" sz="1800" dirty="0"/>
+          </a:p>
+        </p:txBody>
+      </p:sp>
+      <p:sp>
+        <p:nvSpPr>
+          <p:cNvPr id="9" name="Text 7"/>
+          <p:cNvSpPr/>
+          <p:nvPr/>
+        </p:nvSpPr>
+        <p:spPr>
+          <a:xfrm>
+            <a:off x="3794760" y="2542032"/>
+            <a:ext cx="7680960" cy="896112"/>
+          </a:xfrm>
+          <a:prstGeom prst="rect">
+            <a:avLst/>
+          </a:prstGeom>
+          <a:noFill/>
+          <a:ln/>
+        </p:spPr>
+        <p:txBody>
+          <a:bodyPr wrap="square" lIns="0" tIns="0" rIns="0" bIns="0" rtlCol="0" anchor="t"/>
+          <a:lstStyle/>
+          <a:p>
+            <a:pPr algn="l" indent="0" marL="0">
+              <a:buNone/>
+            </a:pPr>
+            <a:r>
+              <a:rPr lang="en-US" sz="1400" dirty="0">
+                <a:solidFill>
+                  <a:srgbClr val="14202C"/>
+                </a:solidFill>
+                <a:latin typeface="Calibri" pitchFamily="34" charset="0"/>
+                <a:ea typeface="Calibri" pitchFamily="34" charset="-122"/>
+                <a:cs typeface="Calibri" pitchFamily="34" charset="-120"/>
+              </a:rPr>
+              <a:t>0.20, 0.60, 0.10, 0.05, 0.05. Price leads. The same cash gap weighs more than stars or popularity.</a:t>
+            </a:r>
+            <a:endParaRPr lang="en-US" sz="1400" dirty="0"/>
+          </a:p>
+        </p:txBody>
+      </p:sp>
+      <p:sp>
+        <p:nvSpPr>
+          <p:cNvPr id="10" name="Shape 8"/>
+          <p:cNvSpPr/>
+          <p:nvPr/>
+        </p:nvSpPr>
+        <p:spPr>
+          <a:xfrm>
+            <a:off x="457200" y="3675888"/>
+            <a:ext cx="11247120" cy="1170432"/>
+          </a:xfrm>
+          <a:prstGeom prst="roundRect">
+            <a:avLst>
+              <a:gd name="adj" fmla="val 6250"/>
+            </a:avLst>
+          </a:prstGeom>
+          <a:solidFill>
+            <a:srgbClr val="FFFFFF"/>
+          </a:solidFill>
+          <a:ln/>
+          <a:effectLst>
+            <a:outerShdw sx="100000" sy="100000" kx="0" ky="0" algn="bl" rotWithShape="0" blurRad="152400" dist="38100" dir="5400000">
+              <a:srgbClr val="0F1C2E">
+                <a:alpha val="10000"/>
+              </a:srgbClr>
+            </a:outerShdw>
+          </a:effectLst>
+        </p:spPr>
+      </p:sp>
+      <p:sp>
+        <p:nvSpPr>
+          <p:cNvPr id="11" name="Text 9"/>
+          <p:cNvSpPr/>
+          <p:nvPr/>
+        </p:nvSpPr>
+        <p:spPr>
+          <a:xfrm>
+            <a:off x="658368" y="3840480"/>
+            <a:ext cx="3017520" cy="822960"/>
+          </a:xfrm>
+          <a:prstGeom prst="rect">
+            <a:avLst/>
+          </a:prstGeom>
+          <a:noFill/>
+          <a:ln/>
+        </p:spPr>
+        <p:txBody>
+          <a:bodyPr wrap="square" lIns="0" tIns="0" rIns="0" bIns="0" rtlCol="0" anchor="ctr"/>
+          <a:lstStyle/>
+          <a:p>
+            <a:pPr algn="l" indent="0" marL="0">
+              <a:buNone/>
+            </a:pPr>
+            <a:r>
+              <a:rPr lang="en-US" sz="1800" b="1" dirty="0">
+                <a:solidFill>
+                  <a:srgbClr val="0F1C2E"/>
+                </a:solidFill>
+                <a:latin typeface="Cambria" pitchFamily="34" charset="0"/>
+                <a:ea typeface="Cambria" pitchFamily="34" charset="-122"/>
+                <a:cs typeface="Cambria" pitchFamily="34" charset="-120"/>
+              </a:rPr>
+              <a:t>Relevance and rating</a:t>
+            </a:r>
+            <a:endParaRPr lang="en-US" sz="1800" dirty="0"/>
+          </a:p>
+        </p:txBody>
+      </p:sp>
+      <p:sp>
+        <p:nvSpPr>
+          <p:cNvPr id="12" name="Text 10"/>
+          <p:cNvSpPr/>
+          <p:nvPr/>
+        </p:nvSpPr>
+        <p:spPr>
+          <a:xfrm>
+            <a:off x="3794760" y="3822192"/>
+            <a:ext cx="7680960" cy="896112"/>
+          </a:xfrm>
+          <a:prstGeom prst="rect">
+            <a:avLst/>
+          </a:prstGeom>
+          <a:noFill/>
+          <a:ln/>
+        </p:spPr>
+        <p:txBody>
+          <a:bodyPr wrap="square" lIns="0" tIns="0" rIns="0" bIns="0" rtlCol="0" anchor="t"/>
+          <a:lstStyle/>
+          <a:p>
+            <a:pPr algn="l" indent="0" marL="0">
+              <a:buNone/>
+            </a:pPr>
+            <a:r>
+              <a:rPr lang="en-US" sz="1400" dirty="0">
+                <a:solidFill>
+                  <a:srgbClr val="14202C"/>
+                </a:solidFill>
+                <a:latin typeface="Calibri" pitchFamily="34" charset="0"/>
+                <a:ea typeface="Calibri" pitchFamily="34" charset="-122"/>
+                <a:cs typeface="Calibri" pitchFamily="34" charset="-120"/>
+              </a:rPr>
+              <a:t>Relevance is 0.60, 0.20, 0.10, 0.05, 0.05. It does not reorder rows that already matched. Rating is 0.20, 0.10, 0.60, 0.05, 0.05.</a:t>
+            </a:r>
+            <a:endParaRPr lang="en-US" sz="1400" dirty="0"/>
+          </a:p>
+        </p:txBody>
+      </p:sp>
+      <p:sp>
+        <p:nvSpPr>
+          <p:cNvPr id="13" name="Shape 11"/>
+          <p:cNvSpPr/>
+          <p:nvPr/>
+        </p:nvSpPr>
+        <p:spPr>
+          <a:xfrm>
+            <a:off x="457200" y="4956048"/>
+            <a:ext cx="11247120" cy="1170432"/>
+          </a:xfrm>
+          <a:prstGeom prst="roundRect">
+            <a:avLst>
+              <a:gd name="adj" fmla="val 6250"/>
+            </a:avLst>
+          </a:prstGeom>
+          <a:solidFill>
+            <a:srgbClr val="FFFFFF"/>
+          </a:solidFill>
+          <a:ln/>
+          <a:effectLst>
+            <a:outerShdw sx="100000" sy="100000" kx="0" ky="0" algn="bl" rotWithShape="0" blurRad="152400" dist="38100" dir="5400000">
+              <a:srgbClr val="0F1C2E">
+                <a:alpha val="10000"/>
+              </a:srgbClr>
+            </a:outerShdw>
+          </a:effectLst>
+        </p:spPr>
+      </p:sp>
+      <p:sp>
+        <p:nvSpPr>
+          <p:cNvPr id="14" name="Text 12"/>
+          <p:cNvSpPr/>
+          <p:nvPr/>
+        </p:nvSpPr>
+        <p:spPr>
+          <a:xfrm>
+            <a:off x="658368" y="5120640"/>
+            <a:ext cx="3017520" cy="822960"/>
+          </a:xfrm>
+          <a:prstGeom prst="rect">
+            <a:avLst/>
+          </a:prstGeom>
+          <a:noFill/>
+          <a:ln/>
+        </p:spPr>
+        <p:txBody>
+          <a:bodyPr wrap="square" lIns="0" tIns="0" rIns="0" bIns="0" rtlCol="0" anchor="ctr"/>
+          <a:lstStyle/>
+          <a:p>
+            <a:pPr algn="l" indent="0" marL="0">
+              <a:buNone/>
+            </a:pPr>
+            <a:r>
+              <a:rPr lang="en-US" sz="1800" b="1" dirty="0">
+                <a:solidFill>
+                  <a:srgbClr val="0F1C2E"/>
+                </a:solidFill>
+                <a:latin typeface="Cambria" pitchFamily="34" charset="0"/>
+                <a:ea typeface="Cambria" pitchFamily="34" charset="-122"/>
+                <a:cs typeface="Cambria" pitchFamily="34" charset="-120"/>
+              </a:rPr>
+              <a:t>Popular and familiar</a:t>
+            </a:r>
+            <a:endParaRPr lang="en-US" sz="1800" dirty="0"/>
+          </a:p>
+        </p:txBody>
+      </p:sp>
+      <p:sp>
+        <p:nvSpPr>
+          <p:cNvPr id="15" name="Text 13"/>
+          <p:cNvSpPr/>
+          <p:nvPr/>
+        </p:nvSpPr>
+        <p:spPr>
+          <a:xfrm>
+            <a:off x="3794760" y="5102352"/>
+            <a:ext cx="7680960" cy="896112"/>
+          </a:xfrm>
+          <a:prstGeom prst="rect">
+            <a:avLst/>
+          </a:prstGeom>
+          <a:noFill/>
+          <a:ln/>
+        </p:spPr>
+        <p:txBody>
+          <a:bodyPr wrap="square" lIns="0" tIns="0" rIns="0" bIns="0" rtlCol="0" anchor="t"/>
+          <a:lstStyle/>
+          <a:p>
+            <a:pPr algn="l" indent="0" marL="0">
+              <a:buNone/>
+            </a:pPr>
+            <a:r>
+              <a:rPr lang="en-US" sz="1400" dirty="0">
+                <a:solidFill>
+                  <a:srgbClr val="14202C"/>
+                </a:solidFill>
+                <a:latin typeface="Calibri" pitchFamily="34" charset="0"/>
+                <a:ea typeface="Calibri" pitchFamily="34" charset="-122"/>
+                <a:cs typeface="Calibri" pitchFamily="34" charset="-120"/>
+              </a:rPr>
+              <a:t>Popular is 0.20, 0.10, 0.05, 0.60, 0.05. Familiar is 0.20, 0.10, 0.05, 0.05, 0.60. Relevance stays 0.20 when it is not the lead.</a:t>
+            </a:r>
+            <a:endParaRPr lang="en-US" sz="1400" dirty="0"/>
+          </a:p>
+        </p:txBody>
+      </p:sp>
+      <p:sp>
+        <p:nvSpPr>
+          <p:cNvPr id="17" name="Text 14"/>
+          <p:cNvSpPr/>
+          <p:nvPr/>
+        </p:nvSpPr>
+        <p:spPr>
+          <a:xfrm>
+            <a:off x="502920" y="6492240"/>
+            <a:ext cx="2743200" cy="201168"/>
+          </a:xfrm>
+          <a:prstGeom prst="rect">
+            <a:avLst/>
+          </a:prstGeom>
+          <a:noFill/>
+          <a:ln/>
+        </p:spPr>
+        <p:txBody>
+          <a:bodyPr wrap="square" lIns="0" tIns="0" rIns="0" bIns="0" rtlCol="0" anchor="ctr"/>
+          <a:lstStyle/>
+          <a:p>
+            <a:pPr indent="0" marL="0">
+              <a:buNone/>
+            </a:pPr>
+            <a:r>
+              <a:rPr lang="en-US" sz="1200" dirty="0">
+                <a:solidFill>
+                  <a:srgbClr val="6A7A88"/>
+                </a:solidFill>
+                <a:latin typeface="Calibri" pitchFamily="34" charset="0"/>
+                <a:ea typeface="Calibri" pitchFamily="34" charset="-122"/>
+                <a:cs typeface="Calibri" pitchFamily="34" charset="-120"/>
+              </a:rPr>
+              <a:t>Scout</a:t>
+            </a:r>
+            <a:endParaRPr lang="en-US" sz="1200" dirty="0"/>
+          </a:p>
+        </p:txBody>
+      </p:sp>
+      <p:sp>
+        <p:nvSpPr>
+          <p:cNvPr id="18" name="Text 15"/>
+          <p:cNvSpPr/>
+          <p:nvPr/>
+        </p:nvSpPr>
+        <p:spPr>
+          <a:xfrm>
+            <a:off x="10424160" y="6492240"/>
+            <a:ext cx="1234440" cy="201168"/>
+          </a:xfrm>
+          <a:prstGeom prst="rect">
+            <a:avLst/>
+          </a:prstGeom>
+          <a:noFill/>
+          <a:ln/>
+        </p:spPr>
+        <p:txBody>
+          <a:bodyPr wrap="square" lIns="0" tIns="0" rIns="0" bIns="0" rtlCol="0" anchor="ctr"/>
+          <a:lstStyle/>
+          <a:p>
+            <a:pPr algn="r" indent="0" marL="0">
+              <a:buNone/>
+            </a:pPr>
+            <a:r>
+              <a:rPr lang="en-US" sz="1200" dirty="0">
+                <a:solidFill>
+                  <a:srgbClr val="6A7A88"/>
+                </a:solidFill>
+                <a:latin typeface="Calibri" pitchFamily="34" charset="0"/>
+                <a:ea typeface="Calibri" pitchFamily="34" charset="-122"/>
+                <a:cs typeface="Calibri" pitchFamily="34" charset="-120"/>
+              </a:rPr>
+              <a:t>27</a:t>
             </a:r>
             <a:endParaRPr lang="en-US" sz="1200" dirty="0"/>
           </a:p>
@@ -30919,7 +31536,7 @@
                 <a:ea typeface="Calibri" pitchFamily="34" charset="-122"/>
                 <a:cs typeface="Calibri" pitchFamily="34" charset="-120"/>
               </a:rPr>
-              <a:t>Ask the person. Keep 0.35, 0.25, 0.15, 0.10, 0.15. A phrase does not replace the signed objective.</a:t>
+              <a:t>Ask the person. Keep 0.35, 0.25, 0.15, 0.10, 0.15. Any named mix asks the same way and does not replace the signed objective.</a:t>
             </a:r>
             <a:endParaRPr lang="en-US" sz="1300" dirty="0"/>
           </a:p>
@@ -32651,7 +33268,7 @@
                 <a:ea typeface="Calibri" pitchFamily="34" charset="-122"/>
                 <a:cs typeface="Calibri" pitchFamily="34" charset="-120"/>
               </a:rPr>
-              <a:t>Snacks or balloons. Quantity can stay blank.</a:t>
+              <a:t>Snacks or groceries. Quantity can stay blank.</a:t>
             </a:r>
             <a:endParaRPr lang="en-US" sz="1100" dirty="0"/>
           </a:p>
